--- a/提交材料/03-答辩PPT.pptx
+++ b/提交材料/03-答辩PPT.pptx
@@ -18610,7 +18610,7 @@
                 <a:latin typeface="微软雅黑" panose="020B0503020204020204" pitchFamily="34" charset="-122"/>
                 <a:ea typeface="微软雅黑" panose="020B0503020204020204" pitchFamily="34" charset="-122"/>
               </a:rPr>
-              <a:t>设备通信与执行调度、四源融合内核、质量门禁（1541 项测试 / 覆盖率 89%）、集成与文档。</a:t>
+              <a:t>设备通信与执行调度、四源融合内核、质量门禁（1552 项测试 / 覆盖率 89%）、集成与文档。</a:t>
             </a:r>
             <a:endParaRPr sz="1350" b="0">
               <a:solidFill>

--- a/提交材料/03-答辩PPT.pptx
+++ b/提交材料/03-答辩PPT.pptx
@@ -18610,7 +18610,7 @@
                 <a:latin typeface="微软雅黑" panose="020B0503020204020204" pitchFamily="34" charset="-122"/>
                 <a:ea typeface="微软雅黑" panose="020B0503020204020204" pitchFamily="34" charset="-122"/>
               </a:rPr>
-              <a:t>设备通信与执行调度、四源融合内核、质量门禁（1552 项测试 / 覆盖率 89%）、集成与文档。</a:t>
+              <a:t>设备通信与执行调度、四源融合内核、质量门禁（1557 项测试 / 覆盖率 89%）、集成与文档。</a:t>
             </a:r>
             <a:endParaRPr sz="1350" b="0">
               <a:solidFill>

--- a/提交材料/03-答辩PPT.pptx
+++ b/提交材料/03-答辩PPT.pptx
@@ -18610,7 +18610,7 @@
                 <a:latin typeface="微软雅黑" panose="020B0503020204020204" pitchFamily="34" charset="-122"/>
                 <a:ea typeface="微软雅黑" panose="020B0503020204020204" pitchFamily="34" charset="-122"/>
               </a:rPr>
-              <a:t>设备通信与执行调度、四源融合内核、质量门禁（1557 项测试 / 覆盖率 89%）、集成与文档。</a:t>
+              <a:t>设备通信与执行调度、四源融合内核、质量门禁（1570 项测试 / 覆盖率 89%）、集成与文档。</a:t>
             </a:r>
             <a:endParaRPr sz="1350" b="0">
               <a:solidFill>

--- a/提交材料/03-答辩PPT.pptx
+++ b/提交材料/03-答辩PPT.pptx
@@ -18610,7 +18610,7 @@
                 <a:latin typeface="微软雅黑" panose="020B0503020204020204" pitchFamily="34" charset="-122"/>
                 <a:ea typeface="微软雅黑" panose="020B0503020204020204" pitchFamily="34" charset="-122"/>
               </a:rPr>
-              <a:t>设备通信与执行调度、四源融合内核、质量门禁（1570 项测试 / 覆盖率 89%）、集成与文档。</a:t>
+              <a:t>设备通信与执行调度、四源融合内核、质量门禁（1574 项测试 / 覆盖率 89%）、集成与文档。</a:t>
             </a:r>
             <a:endParaRPr sz="1350" b="0">
               <a:solidFill>

--- a/提交材料/03-答辩PPT.pptx
+++ b/提交材料/03-答辩PPT.pptx
@@ -18610,7 +18610,7 @@
                 <a:latin typeface="微软雅黑" panose="020B0503020204020204" pitchFamily="34" charset="-122"/>
                 <a:ea typeface="微软雅黑" panose="020B0503020204020204" pitchFamily="34" charset="-122"/>
               </a:rPr>
-              <a:t>设备通信与执行调度、四源融合内核、质量门禁（1574 项测试 / 覆盖率 89%）、集成与文档。</a:t>
+              <a:t>设备通信与执行调度、四源融合内核、质量门禁（1580 项测试 / 覆盖率 89%）、集成与文档。</a:t>
             </a:r>
             <a:endParaRPr sz="1350" b="0">
               <a:solidFill>

--- a/提交材料/03-答辩PPT.pptx
+++ b/提交材料/03-答辩PPT.pptx
@@ -5,7 +5,7 @@
     <p:sldMasterId id="2147483648" r:id="rId1"/>
   </p:sldMasterIdLst>
   <p:notesMasterIdLst>
-    <p:notesMasterId r:id="rId18"/>
+    <p:notesMasterId r:id="rId19"/>
   </p:notesMasterIdLst>
   <p:sldIdLst>
     <p:sldId id="256" r:id="rId3"/>
@@ -17,12 +17,13 @@
     <p:sldId id="279" r:id="rId9"/>
     <p:sldId id="280" r:id="rId10"/>
     <p:sldId id="272" r:id="rId11"/>
-    <p:sldId id="284" r:id="rId12"/>
+    <p:sldId id="288" r:id="rId12"/>
     <p:sldId id="269" r:id="rId13"/>
-    <p:sldId id="274" r:id="rId14"/>
-    <p:sldId id="285" r:id="rId15"/>
-    <p:sldId id="281" r:id="rId16"/>
-    <p:sldId id="277" r:id="rId17"/>
+    <p:sldId id="289" r:id="rId14"/>
+    <p:sldId id="274" r:id="rId15"/>
+    <p:sldId id="285" r:id="rId16"/>
+    <p:sldId id="281" r:id="rId17"/>
+    <p:sldId id="277" r:id="rId18"/>
   </p:sldIdLst>
   <p:sldSz cx="12192000" cy="6858000"/>
   <p:notesSz cx="6858000" cy="9144000"/>
@@ -3022,26 +3023,20 @@
           <a:bodyPr wrap="square"/>
           <a:lstStyle/>
           <a:p>
-            <a:pPr algn="l">
-              <a:buClrTx/>
-              <a:buSzTx/>
-            </a:pPr>
             <a:r>
               <a:rPr sz="2400">
                 <a:solidFill>
                   <a:srgbClr val="0879C9"/>
                 </a:solidFill>
                 <a:latin typeface="微软雅黑" panose="020B0503020204020204" pitchFamily="34" charset="-122"/>
-                <a:ea typeface="微软雅黑" panose="020B0503020204020204" pitchFamily="34" charset="-122"/>
-              </a:rPr>
-              <a:t>03 生成与压力测试：四类覆盖</a:t>
+              </a:rPr>
+              <a:t>03 自动探索与用例执行</a:t>
             </a:r>
             <a:endParaRPr sz="2400">
               <a:solidFill>
                 <a:srgbClr val="0879C9"/>
               </a:solidFill>
               <a:latin typeface="微软雅黑" panose="020B0503020204020204" pitchFamily="34" charset="-122"/>
-              <a:ea typeface="微软雅黑" panose="020B0503020204020204" pitchFamily="34" charset="-122"/>
             </a:endParaRPr>
           </a:p>
         </p:txBody>
@@ -3062,146 +3057,14 @@
         </p:blipFill>
         <p:spPr>
           <a:xfrm>
-            <a:off x="508000" y="889000"/>
-            <a:ext cx="5461000" cy="3924300"/>
+            <a:off x="508000" y="1271181"/>
+            <a:ext cx="5334000" cy="3833037"/>
           </a:xfrm>
           <a:prstGeom prst="rect">
             <a:avLst/>
           </a:prstGeom>
         </p:spPr>
       </p:pic>
-      <p:sp>
-        <p:nvSpPr>
-          <p:cNvPr id="86" name="P14 解析"/>
-          <p:cNvSpPr/>
-          <p:nvPr/>
-        </p:nvSpPr>
-        <p:spPr>
-          <a:xfrm>
-            <a:off x="508000" y="5003800"/>
-            <a:ext cx="11176000" cy="1168400"/>
-          </a:xfrm>
-          <a:prstGeom prst="roundRect">
-            <a:avLst>
-              <a:gd name="adj" fmla="val 10000"/>
-            </a:avLst>
-          </a:prstGeom>
-          <a:solidFill>
-            <a:srgbClr val="E6F6FE"/>
-          </a:solidFill>
-          <a:ln w="12700">
-            <a:solidFill>
-              <a:srgbClr val="CFE6F7"/>
-            </a:solidFill>
-          </a:ln>
-          <a:effectLst/>
-        </p:spPr>
-        <p:txBody>
-          <a:bodyPr wrap="square" lIns="254000" tIns="127000" rIns="254000" bIns="127000" rtlCol="0" anchor="ctr"/>
-          <a:lstStyle/>
-          <a:p>
-            <a:pPr algn="l">
-              <a:lnSpc>
-                <a:spcPct val="100000"/>
-              </a:lnSpc>
-              <a:spcAft>
-                <a:spcPts val="600"/>
-              </a:spcAft>
-            </a:pPr>
-            <a:r>
-              <a:rPr sz="1700" b="1">
-                <a:solidFill>
-                  <a:srgbClr val="0879C9"/>
-                </a:solidFill>
-                <a:latin typeface="微软雅黑" panose="020B0503020204020204" pitchFamily="34" charset="-122"/>
-                <a:ea typeface="微软雅黑" panose="020B0503020204020204" pitchFamily="34" charset="-122"/>
-              </a:rPr>
-              <a:t>　</a:t>
-            </a:r>
-            <a:r>
-              <a:rPr sz="1700" b="0">
-                <a:solidFill>
-                  <a:srgbClr val="1A1A1A"/>
-                </a:solidFill>
-                <a:latin typeface="微软雅黑" panose="020B0503020204020204" pitchFamily="34" charset="-122"/>
-                <a:ea typeface="微软雅黑" panose="020B0503020204020204" pitchFamily="34" charset="-122"/>
-              </a:rPr>
-              <a:t>左边这条 9 步用例由探索图自动拆出，含 4 次等待、2 处断言，是可直接执行的产物而非文本描述。</a:t>
-            </a:r>
-            <a:endParaRPr sz="1700" b="0">
-              <a:solidFill>
-                <a:srgbClr val="1A1A1A"/>
-              </a:solidFill>
-              <a:latin typeface="微软雅黑" panose="020B0503020204020204" pitchFamily="34" charset="-122"/>
-              <a:ea typeface="微软雅黑" panose="020B0503020204020204" pitchFamily="34" charset="-122"/>
-            </a:endParaRPr>
-          </a:p>
-          <a:p>
-            <a:pPr algn="l">
-              <a:lnSpc>
-                <a:spcPct val="100000"/>
-              </a:lnSpc>
-            </a:pPr>
-            <a:r>
-              <a:rPr sz="1700" b="0">
-                <a:solidFill>
-                  <a:srgbClr val="1A1A1A"/>
-                </a:solidFill>
-                <a:latin typeface="微软雅黑" panose="020B0503020204020204" pitchFamily="34" charset="-122"/>
-                <a:ea typeface="微软雅黑" panose="020B0503020204020204" pitchFamily="34" charset="-122"/>
-              </a:rPr>
-              <a:t>　压力测试四类</a:t>
-            </a:r>
-            <a:r>
-              <a:rPr lang="zh-CN" sz="1700" b="0">
-                <a:solidFill>
-                  <a:srgbClr val="1A1A1A"/>
-                </a:solidFill>
-                <a:latin typeface="微软雅黑" panose="020B0503020204020204" pitchFamily="34" charset="-122"/>
-                <a:ea typeface="微软雅黑" panose="020B0503020204020204" pitchFamily="34" charset="-122"/>
-              </a:rPr>
-              <a:t>：</a:t>
-            </a:r>
-            <a:r>
-              <a:rPr sz="1700" b="0">
-                <a:solidFill>
-                  <a:srgbClr val="1A1A1A"/>
-                </a:solidFill>
-                <a:latin typeface="微软雅黑" panose="020B0503020204020204" pitchFamily="34" charset="-122"/>
-                <a:ea typeface="微软雅黑" panose="020B0503020204020204" pitchFamily="34" charset="-122"/>
-              </a:rPr>
-              <a:t>重复点击 · 连续滑动 · 页面反复进出 · 长时间运行</a:t>
-            </a:r>
-            <a:r>
-              <a:rPr lang="zh-CN" sz="1700" b="0">
-                <a:solidFill>
-                  <a:srgbClr val="1A1A1A"/>
-                </a:solidFill>
-                <a:latin typeface="微软雅黑" panose="020B0503020204020204" pitchFamily="34" charset="-122"/>
-                <a:ea typeface="微软雅黑" panose="020B0503020204020204" pitchFamily="34" charset="-122"/>
-              </a:rPr>
-              <a:t>。</a:t>
-            </a:r>
-            <a:r>
-              <a:rPr sz="1700" b="0">
-                <a:solidFill>
-                  <a:srgbClr val="1A1A1A"/>
-                </a:solidFill>
-                <a:latin typeface="微软雅黑" panose="020B0503020204020204" pitchFamily="34" charset="-122"/>
-                <a:ea typeface="微软雅黑" panose="020B0503020204020204" pitchFamily="34" charset="-122"/>
-              </a:rPr>
-              <a:t>共用同一套执行与归因链路；长时间运行拆 115 条同构用例分块跑，失败能定位到轮次与步骤，可从断点续跑。</a:t>
-            </a:r>
-            <a:endParaRPr sz="1700" b="0">
-              <a:solidFill>
-                <a:srgbClr val="1A1A1A"/>
-              </a:solidFill>
-              <a:latin typeface="微软雅黑" panose="020B0503020204020204" pitchFamily="34" charset="-122"/>
-              <a:ea typeface="微软雅黑" panose="020B0503020204020204" pitchFamily="34" charset="-122"/>
-            </a:endParaRPr>
-          </a:p>
-        </p:txBody>
-      </p:sp>
       <p:pic>
         <p:nvPicPr>
           <p:cNvPr id="87" name="P14 执行报告" descr="fig_p14b.png"/>
@@ -3218,14 +3081,119 @@
         </p:blipFill>
         <p:spPr>
           <a:xfrm>
-            <a:off x="6172200" y="889000"/>
-            <a:ext cx="5461000" cy="3873500"/>
+            <a:off x="6350000" y="1295991"/>
+            <a:ext cx="5334000" cy="3783418"/>
           </a:xfrm>
           <a:prstGeom prst="rect">
             <a:avLst/>
           </a:prstGeom>
         </p:spPr>
       </p:pic>
+      <p:sp>
+        <p:nvSpPr>
+          <p:cNvPr id="88" name="生成到执行"/>
+          <p:cNvSpPr/>
+          <p:nvPr/>
+        </p:nvSpPr>
+        <p:spPr>
+          <a:xfrm>
+            <a:off x="5943600" y="2997200"/>
+            <a:ext cx="330200" cy="381000"/>
+          </a:xfrm>
+          <a:prstGeom prst="rightArrow">
+            <a:avLst/>
+          </a:prstGeom>
+          <a:solidFill>
+            <a:srgbClr val="4FA9E8"/>
+          </a:solidFill>
+          <a:ln>
+            <a:noFill/>
+          </a:ln>
+          <a:effectLst/>
+        </p:spPr>
+        <p:style>
+          <a:lnRef idx="1">
+            <a:schemeClr val="accent1"/>
+          </a:lnRef>
+          <a:fillRef idx="3">
+            <a:schemeClr val="accent1"/>
+          </a:fillRef>
+          <a:effectRef idx="2">
+            <a:schemeClr val="accent1"/>
+          </a:effectRef>
+          <a:fontRef idx="minor">
+            <a:schemeClr val="lt1"/>
+          </a:fontRef>
+        </p:style>
+        <p:txBody>
+          <a:bodyPr rtlCol="0" anchor="ctr"/>
+          <a:lstStyle/>
+          <a:p>
+            <a:pPr algn="ctr"/>
+          </a:p>
+        </p:txBody>
+      </p:sp>
+      <p:sp>
+        <p:nvSpPr>
+          <p:cNvPr id="89" name="结论条"/>
+          <p:cNvSpPr/>
+          <p:nvPr/>
+        </p:nvSpPr>
+        <p:spPr>
+          <a:xfrm>
+            <a:off x="508000" y="5384800"/>
+            <a:ext cx="11176000" cy="584200"/>
+          </a:xfrm>
+          <a:prstGeom prst="roundRect">
+            <a:avLst>
+              <a:gd name="adj" fmla="val 50000"/>
+            </a:avLst>
+          </a:prstGeom>
+          <a:solidFill>
+            <a:srgbClr val="E6F6FE"/>
+          </a:solidFill>
+          <a:ln>
+            <a:noFill/>
+          </a:ln>
+          <a:effectLst/>
+        </p:spPr>
+        <p:style>
+          <a:lnRef idx="1">
+            <a:schemeClr val="accent1"/>
+          </a:lnRef>
+          <a:fillRef idx="3">
+            <a:schemeClr val="accent1"/>
+          </a:fillRef>
+          <a:effectRef idx="2">
+            <a:schemeClr val="accent1"/>
+          </a:effectRef>
+          <a:fontRef idx="minor">
+            <a:schemeClr val="lt1"/>
+          </a:fontRef>
+        </p:style>
+        <p:txBody>
+          <a:bodyPr wrap="square" tIns="0" bIns="0" rtlCol="0" anchor="ctr"/>
+          <a:lstStyle/>
+          <a:p>
+            <a:pPr algn="ctr"/>
+            <a:r>
+              <a:rPr sz="1800" b="1">
+                <a:solidFill>
+                  <a:srgbClr val="0B4A77"/>
+                </a:solidFill>
+                <a:latin typeface="微软雅黑" panose="020B0503020204020204" pitchFamily="34" charset="-122"/>
+              </a:rPr>
+              <a:t>一条用例，从探索生成到真机跑通，全程无人工。</a:t>
+            </a:r>
+            <a:endParaRPr sz="1800" b="1">
+              <a:solidFill>
+                <a:srgbClr val="0B4A77"/>
+              </a:solidFill>
+              <a:latin typeface="微软雅黑" panose="020B0503020204020204" pitchFamily="34" charset="-122"/>
+            </a:endParaRPr>
+          </a:p>
+        </p:txBody>
+      </p:sp>
     </p:spTree>
   </p:cSld>
   <p:clrMapOvr>
@@ -3965,6 +3933,436 @@
   <p:cSld>
     <p:spTree>
       <p:nvGrpSpPr>
+        <p:cNvPr id="1" name=""/>
+        <p:cNvGrpSpPr/>
+        <p:nvPr/>
+      </p:nvGrpSpPr>
+      <p:grpSpPr/>
+      <p:sp>
+        <p:nvSpPr>
+          <p:cNvPr id="2" name="Text Placeholder 1"/>
+          <p:cNvSpPr>
+            <a:spLocks noGrp="1"/>
+          </p:cNvSpPr>
+          <p:nvPr>
+            <p:ph type="body" sz="quarter" idx="13"/>
+          </p:nvPr>
+        </p:nvSpPr>
+        <p:spPr/>
+        <p:txBody>
+          <a:bodyPr/>
+          <a:lstStyle/>
+          <a:p>
+            <a:r>
+              <a:rPr sz="2400">
+                <a:solidFill>
+                  <a:srgbClr val="0879C9"/>
+                </a:solidFill>
+                <a:latin typeface="微软雅黑" panose="020B0503020204020204" pitchFamily="34" charset="-122"/>
+              </a:rPr>
+              <a:t>03 压力测试：真机实测</a:t>
+            </a:r>
+            <a:endParaRPr sz="2400">
+              <a:solidFill>
+                <a:srgbClr val="0879C9"/>
+              </a:solidFill>
+              <a:latin typeface="微软雅黑" panose="020B0503020204020204" pitchFamily="34" charset="-122"/>
+            </a:endParaRPr>
+          </a:p>
+        </p:txBody>
+      </p:sp>
+      <p:sp>
+        <p:nvSpPr>
+          <p:cNvPr id="14" name="结论条"/>
+          <p:cNvSpPr/>
+          <p:nvPr/>
+        </p:nvSpPr>
+        <p:spPr>
+          <a:xfrm>
+            <a:off x="508000" y="5384800"/>
+            <a:ext cx="11176000" cy="584200"/>
+          </a:xfrm>
+          <a:prstGeom prst="roundRect">
+            <a:avLst>
+              <a:gd name="adj" fmla="val 50000"/>
+            </a:avLst>
+          </a:prstGeom>
+          <a:solidFill>
+            <a:srgbClr val="E6F6FE"/>
+          </a:solidFill>
+          <a:ln>
+            <a:noFill/>
+          </a:ln>
+          <a:effectLst/>
+        </p:spPr>
+        <p:style>
+          <a:lnRef idx="1">
+            <a:schemeClr val="accent1"/>
+          </a:lnRef>
+          <a:fillRef idx="3">
+            <a:schemeClr val="accent1"/>
+          </a:fillRef>
+          <a:effectRef idx="2">
+            <a:schemeClr val="accent1"/>
+          </a:effectRef>
+          <a:fontRef idx="minor">
+            <a:schemeClr val="lt1"/>
+          </a:fontRef>
+        </p:style>
+        <p:txBody>
+          <a:bodyPr wrap="square" tIns="0" bIns="0" rtlCol="0" anchor="ctr"/>
+          <a:lstStyle/>
+          <a:p>
+            <a:pPr algn="ctr"/>
+            <a:r>
+              <a:rPr sz="1800" b="1">
+                <a:solidFill>
+                  <a:srgbClr val="0B4A77"/>
+                </a:solidFill>
+                <a:latin typeface="微软雅黑" panose="020B0503020204020204" pitchFamily="34" charset="-122"/>
+              </a:rPr>
+              <a:t>三轮实测同一套链路：暴露缺陷 → 归因修复 → 回归验证。</a:t>
+            </a:r>
+            <a:endParaRPr sz="1800" b="1">
+              <a:solidFill>
+                <a:srgbClr val="0B4A77"/>
+              </a:solidFill>
+              <a:latin typeface="微软雅黑" panose="020B0503020204020204" pitchFamily="34" charset="-122"/>
+            </a:endParaRPr>
+          </a:p>
+        </p:txBody>
+      </p:sp>
+      <p:sp>
+        <p:nvSpPr>
+          <p:cNvPr id="15" name="TextBox 14"/>
+          <p:cNvSpPr txBox="1"/>
+          <p:nvPr/>
+        </p:nvSpPr>
+        <p:spPr>
+          <a:xfrm>
+            <a:off x="508000" y="1080000"/>
+            <a:ext cx="3572933" cy="380000"/>
+          </a:xfrm>
+          <a:prstGeom prst="rect">
+            <a:avLst/>
+          </a:prstGeom>
+          <a:noFill/>
+        </p:spPr>
+        <p:txBody>
+          <a:bodyPr wrap="square">
+            <a:spAutoFit/>
+          </a:bodyPr>
+          <a:lstStyle/>
+          <a:p>
+            <a:pPr algn="ctr"/>
+            <a:r>
+              <a:rPr sz="1700" b="1">
+                <a:solidFill>
+                  <a:srgbClr val="0B4A77"/>
+                </a:solidFill>
+                <a:latin typeface="微软雅黑" panose="020B0503020204020204" pitchFamily="34" charset="-122"/>
+              </a:rPr>
+              <a:t>重复点击</a:t>
+            </a:r>
+            <a:endParaRPr sz="1700" b="1">
+              <a:solidFill>
+                <a:srgbClr val="0B4A77"/>
+              </a:solidFill>
+              <a:latin typeface="微软雅黑" panose="020B0503020204020204" pitchFamily="34" charset="-122"/>
+            </a:endParaRPr>
+          </a:p>
+        </p:txBody>
+      </p:sp>
+      <p:pic>
+        <p:nvPicPr>
+          <p:cNvPr id="16" name="Picture 15" descr="image.png"/>
+          <p:cNvPicPr>
+            <a:picLocks noChangeAspect="1"/>
+          </p:cNvPicPr>
+          <p:nvPr/>
+        </p:nvPicPr>
+        <p:blipFill>
+          <a:blip r:embed="rId1"/>
+          <a:stretch>
+            <a:fillRect/>
+          </a:stretch>
+        </p:blipFill>
+        <p:spPr>
+          <a:xfrm>
+            <a:off x="1492904" y="1520000"/>
+            <a:ext cx="1603125" cy="2850000"/>
+          </a:xfrm>
+          <a:prstGeom prst="rect">
+            <a:avLst/>
+          </a:prstGeom>
+        </p:spPr>
+      </p:pic>
+      <p:sp>
+        <p:nvSpPr>
+          <p:cNvPr id="17" name="TextBox 16"/>
+          <p:cNvSpPr txBox="1"/>
+          <p:nvPr/>
+        </p:nvSpPr>
+        <p:spPr>
+          <a:xfrm>
+            <a:off x="508000" y="4560000"/>
+            <a:ext cx="3572933" cy="740000"/>
+          </a:xfrm>
+          <a:prstGeom prst="rect">
+            <a:avLst/>
+          </a:prstGeom>
+          <a:noFill/>
+        </p:spPr>
+        <p:txBody>
+          <a:bodyPr wrap="square" anchor="t">
+            <a:spAutoFit/>
+          </a:bodyPr>
+          <a:lstStyle/>
+          <a:p>
+            <a:pPr algn="ctr"/>
+            <a:r>
+              <a:rPr sz="1400" b="0">
+                <a:solidFill>
+                  <a:srgbClr val="1A1A1A"/>
+                </a:solidFill>
+                <a:latin typeface="微软雅黑" panose="020B0503020204020204" pitchFamily="34" charset="-122"/>
+              </a:rPr>
+              <a:t>计算器加法 220 轮 · 2200 步 · 0 失败</a:t>
+            </a:r>
+            <a:endParaRPr sz="1400" b="0">
+              <a:solidFill>
+                <a:srgbClr val="1A1A1A"/>
+              </a:solidFill>
+              <a:latin typeface="微软雅黑" panose="020B0503020204020204" pitchFamily="34" charset="-122"/>
+            </a:endParaRPr>
+          </a:p>
+        </p:txBody>
+      </p:sp>
+      <p:sp>
+        <p:nvSpPr>
+          <p:cNvPr id="18" name="TextBox 17"/>
+          <p:cNvSpPr txBox="1"/>
+          <p:nvPr/>
+        </p:nvSpPr>
+        <p:spPr>
+          <a:xfrm>
+            <a:off x="4309533" y="1080000"/>
+            <a:ext cx="3572933" cy="380000"/>
+          </a:xfrm>
+          <a:prstGeom prst="rect">
+            <a:avLst/>
+          </a:prstGeom>
+          <a:noFill/>
+        </p:spPr>
+        <p:txBody>
+          <a:bodyPr wrap="square">
+            <a:spAutoFit/>
+          </a:bodyPr>
+          <a:lstStyle/>
+          <a:p>
+            <a:pPr algn="ctr"/>
+            <a:r>
+              <a:rPr sz="1700" b="1">
+                <a:solidFill>
+                  <a:srgbClr val="0B4A77"/>
+                </a:solidFill>
+                <a:latin typeface="微软雅黑" panose="020B0503020204020204" pitchFamily="34" charset="-122"/>
+              </a:rPr>
+              <a:t>连续滑动</a:t>
+            </a:r>
+            <a:endParaRPr sz="1700" b="1">
+              <a:solidFill>
+                <a:srgbClr val="0B4A77"/>
+              </a:solidFill>
+              <a:latin typeface="微软雅黑" panose="020B0503020204020204" pitchFamily="34" charset="-122"/>
+            </a:endParaRPr>
+          </a:p>
+        </p:txBody>
+      </p:sp>
+      <p:pic>
+        <p:nvPicPr>
+          <p:cNvPr id="19" name="Picture 18" descr="p11_swipe_case.png"/>
+          <p:cNvPicPr>
+            <a:picLocks noChangeAspect="1"/>
+          </p:cNvPicPr>
+          <p:nvPr/>
+        </p:nvPicPr>
+        <p:blipFill>
+          <a:blip r:embed="rId2"/>
+          <a:stretch>
+            <a:fillRect/>
+          </a:stretch>
+        </p:blipFill>
+        <p:spPr>
+          <a:xfrm>
+            <a:off x="4309533" y="1520000"/>
+            <a:ext cx="3572933" cy="2567526"/>
+          </a:xfrm>
+          <a:prstGeom prst="rect">
+            <a:avLst/>
+          </a:prstGeom>
+        </p:spPr>
+      </p:pic>
+      <p:sp>
+        <p:nvSpPr>
+          <p:cNvPr id="20" name="TextBox 19"/>
+          <p:cNvSpPr txBox="1"/>
+          <p:nvPr/>
+        </p:nvSpPr>
+        <p:spPr>
+          <a:xfrm>
+            <a:off x="4309533" y="4560000"/>
+            <a:ext cx="3572933" cy="740000"/>
+          </a:xfrm>
+          <a:prstGeom prst="rect">
+            <a:avLst/>
+          </a:prstGeom>
+          <a:noFill/>
+        </p:spPr>
+        <p:txBody>
+          <a:bodyPr wrap="square" anchor="t">
+            <a:spAutoFit/>
+          </a:bodyPr>
+          <a:lstStyle/>
+          <a:p>
+            <a:pPr algn="ctr"/>
+            <a:r>
+              <a:rPr sz="1400" b="0">
+                <a:solidFill>
+                  <a:srgbClr val="1A1A1A"/>
+                </a:solidFill>
+                <a:latin typeface="微软雅黑" panose="020B0503020204020204" pitchFamily="34" charset="-122"/>
+              </a:rPr>
+              <a:t>设置列表 20 轮 · 180 步 · 0 失败 · 15.7 分钟</a:t>
+            </a:r>
+            <a:endParaRPr sz="1400" b="0">
+              <a:solidFill>
+                <a:srgbClr val="1A1A1A"/>
+              </a:solidFill>
+              <a:latin typeface="微软雅黑" panose="020B0503020204020204" pitchFamily="34" charset="-122"/>
+            </a:endParaRPr>
+          </a:p>
+        </p:txBody>
+      </p:sp>
+      <p:sp>
+        <p:nvSpPr>
+          <p:cNvPr id="21" name="TextBox 20"/>
+          <p:cNvSpPr txBox="1"/>
+          <p:nvPr/>
+        </p:nvSpPr>
+        <p:spPr>
+          <a:xfrm>
+            <a:off x="8111066" y="1080000"/>
+            <a:ext cx="3572933" cy="380000"/>
+          </a:xfrm>
+          <a:prstGeom prst="rect">
+            <a:avLst/>
+          </a:prstGeom>
+          <a:noFill/>
+        </p:spPr>
+        <p:txBody>
+          <a:bodyPr wrap="square">
+            <a:spAutoFit/>
+          </a:bodyPr>
+          <a:lstStyle/>
+          <a:p>
+            <a:pPr algn="ctr"/>
+            <a:r>
+              <a:rPr sz="1700" b="1">
+                <a:solidFill>
+                  <a:srgbClr val="0B4A77"/>
+                </a:solidFill>
+                <a:latin typeface="微软雅黑" panose="020B0503020204020204" pitchFamily="34" charset="-122"/>
+              </a:rPr>
+              <a:t>页面反复进出 + 长时间运行</a:t>
+            </a:r>
+            <a:endParaRPr sz="1700" b="1">
+              <a:solidFill>
+                <a:srgbClr val="0B4A77"/>
+              </a:solidFill>
+              <a:latin typeface="微软雅黑" panose="020B0503020204020204" pitchFamily="34" charset="-122"/>
+            </a:endParaRPr>
+          </a:p>
+        </p:txBody>
+      </p:sp>
+      <p:pic>
+        <p:nvPicPr>
+          <p:cNvPr id="22" name="Picture 21" descr="image.png"/>
+          <p:cNvPicPr>
+            <a:picLocks noChangeAspect="1"/>
+          </p:cNvPicPr>
+          <p:nvPr/>
+        </p:nvPicPr>
+        <p:blipFill>
+          <a:blip r:embed="rId3"/>
+          <a:stretch>
+            <a:fillRect/>
+          </a:stretch>
+        </p:blipFill>
+        <p:spPr>
+          <a:xfrm>
+            <a:off x="8111066" y="1520000"/>
+            <a:ext cx="3572933" cy="2143759"/>
+          </a:xfrm>
+          <a:prstGeom prst="rect">
+            <a:avLst/>
+          </a:prstGeom>
+        </p:spPr>
+      </p:pic>
+      <p:sp>
+        <p:nvSpPr>
+          <p:cNvPr id="23" name="TextBox 22"/>
+          <p:cNvSpPr txBox="1"/>
+          <p:nvPr/>
+        </p:nvSpPr>
+        <p:spPr>
+          <a:xfrm>
+            <a:off x="8111066" y="4560000"/>
+            <a:ext cx="3572933" cy="740000"/>
+          </a:xfrm>
+          <a:prstGeom prst="rect">
+            <a:avLst/>
+          </a:prstGeom>
+          <a:noFill/>
+        </p:spPr>
+        <p:txBody>
+          <a:bodyPr wrap="square" anchor="t">
+            <a:spAutoFit/>
+          </a:bodyPr>
+          <a:lstStyle/>
+          <a:p>
+            <a:pPr algn="ctr"/>
+            <a:r>
+              <a:rPr sz="1400" b="0">
+                <a:solidFill>
+                  <a:srgbClr val="1A1A1A"/>
+                </a:solidFill>
+                <a:latin typeface="微软雅黑" panose="020B0503020204020204" pitchFamily="34" charset="-122"/>
+              </a:rPr>
+              <a:t>90 轮暴露用例缺陷 → 修复后 115 轮 0 失败</a:t>
+            </a:r>
+            <a:endParaRPr sz="1400" b="0">
+              <a:solidFill>
+                <a:srgbClr val="1A1A1A"/>
+              </a:solidFill>
+              <a:latin typeface="微软雅黑" panose="020B0503020204020204" pitchFamily="34" charset="-122"/>
+            </a:endParaRPr>
+          </a:p>
+        </p:txBody>
+      </p:sp>
+    </p:spTree>
+  </p:cSld>
+  <p:clrMapOvr>
+    <a:masterClrMapping/>
+  </p:clrMapOvr>
+</p:sld>
+</file>
+
+<file path=ppt/slides/slide13.xml><?xml version="1.0" encoding="utf-8"?>
+<p:sld xmlns:a="http://schemas.openxmlformats.org/drawingml/2006/main" xmlns:r="http://schemas.openxmlformats.org/officeDocument/2006/relationships" xmlns:p="http://schemas.openxmlformats.org/presentationml/2006/main">
+  <p:cSld>
+    <p:spTree>
+      <p:nvGrpSpPr>
         <p:cNvPr id="88" name=""/>
         <p:cNvGrpSpPr/>
         <p:nvPr/>
@@ -4400,7 +4798,7 @@
 </p:sld>
 </file>
 
-<file path=ppt/slides/slide13.xml><?xml version="1.0" encoding="utf-8"?>
+<file path=ppt/slides/slide14.xml><?xml version="1.0" encoding="utf-8"?>
 <p:sld xmlns:a="http://schemas.openxmlformats.org/drawingml/2006/main" xmlns:r="http://schemas.openxmlformats.org/officeDocument/2006/relationships" xmlns:p="http://schemas.openxmlformats.org/presentationml/2006/main">
   <p:cSld>
     <p:spTree>
@@ -4465,7 +4863,7 @@
                 <a:latin typeface="微软雅黑" panose="020B0503020204020204" pitchFamily="34" charset="-122"/>
                 <a:ea typeface="微软雅黑" panose="020B0503020204020204" pitchFamily="34" charset="-122"/>
               </a:rPr>
-              <a:t>总结</a:t>
+              <a:t>特点</a:t>
             </a:r>
             <a:r>
               <a:rPr sz="2400" b="1">
@@ -5381,7 +5779,7 @@
 </p:sld>
 </file>
 
-<file path=ppt/slides/slide14.xml><?xml version="1.0" encoding="utf-8"?>
+<file path=ppt/slides/slide15.xml><?xml version="1.0" encoding="utf-8"?>
 <p:sld xmlns:a="http://schemas.openxmlformats.org/drawingml/2006/main" xmlns:r="http://schemas.openxmlformats.org/officeDocument/2006/relationships" xmlns:p="http://schemas.openxmlformats.org/presentationml/2006/main">
   <p:cSld>
     <p:spTree>
@@ -5841,18 +6239,18 @@
                         </a:lnSpc>
                       </a:pPr>
                       <a:r>
-                        <a:rPr sz="1600" b="0">
+                        <a:rPr sz="1600" b="1">
                           <a:solidFill>
-                            <a:srgbClr val="4A6B80"/>
+                            <a:srgbClr val="0879C9"/>
                           </a:solidFill>
                           <a:latin typeface="微软雅黑" panose="020B0503020204020204" pitchFamily="34" charset="-122"/>
                           <a:ea typeface="微软雅黑" panose="020B0503020204020204" pitchFamily="34" charset="-122"/>
                         </a:rPr>
                         <a:t>完成</a:t>
                       </a:r>
-                      <a:endParaRPr sz="1600" b="0">
+                      <a:endParaRPr sz="1600" b="1">
                         <a:solidFill>
-                          <a:srgbClr val="4A6B80"/>
+                          <a:srgbClr val="0879C9"/>
                         </a:solidFill>
                         <a:latin typeface="微软雅黑" panose="020B0503020204020204" pitchFamily="34" charset="-122"/>
                         <a:ea typeface="微软雅黑" panose="020B0503020204020204" pitchFamily="34" charset="-122"/>
@@ -5894,20 +6292,23 @@
                         <a:lnSpc>
                           <a:spcPct val="100000"/>
                         </a:lnSpc>
+                        <a:buClrTx/>
+                        <a:buSzTx/>
+                        <a:buFontTx/>
                       </a:pPr>
                       <a:r>
                         <a:rPr sz="1600" b="0">
                           <a:solidFill>
-                            <a:srgbClr val="4A6B80"/>
+                            <a:srgbClr val="1A1A1A"/>
                           </a:solidFill>
                           <a:latin typeface="微软雅黑" panose="020B0503020204020204" pitchFamily="34" charset="-122"/>
                           <a:ea typeface="微软雅黑" panose="020B0503020204020204" pitchFamily="34" charset="-122"/>
                         </a:rPr>
-                        <a:t>→ 四路来源 · 仅 70/1648 带 id</a:t>
+                        <a:t>四路来源 · 仅 70/1648 带 id</a:t>
                       </a:r>
                       <a:endParaRPr sz="1600" b="0">
                         <a:solidFill>
-                          <a:srgbClr val="4A6B80"/>
+                          <a:srgbClr val="1A1A1A"/>
                         </a:solidFill>
                         <a:latin typeface="微软雅黑" panose="020B0503020204020204" pitchFamily="34" charset="-122"/>
                         <a:ea typeface="微软雅黑" panose="020B0503020204020204" pitchFamily="34" charset="-122"/>
@@ -6028,7 +6429,7 @@
                           <a:latin typeface="微软雅黑" panose="020B0503020204020204" pitchFamily="34" charset="-122"/>
                           <a:ea typeface="微软雅黑" panose="020B0503020204020204" pitchFamily="34" charset="-122"/>
                         </a:rPr>
-                        <a:t>超额完成</a:t>
+                        <a:t>完成</a:t>
                       </a:r>
                       <a:endParaRPr sz="1600" b="1">
                         <a:solidFill>
@@ -6074,6 +6475,9 @@
                         <a:lnSpc>
                           <a:spcPct val="100000"/>
                         </a:lnSpc>
+                        <a:buClrTx/>
+                        <a:buSzTx/>
+                        <a:buFontTx/>
                       </a:pPr>
                       <a:r>
                         <a:rPr sz="1600" b="0">
@@ -6083,7 +6487,7 @@
                           <a:latin typeface="微软雅黑" panose="020B0503020204020204" pitchFamily="34" charset="-122"/>
                           <a:ea typeface="微软雅黑" panose="020B0503020204020204" pitchFamily="34" charset="-122"/>
                         </a:rPr>
-                        <a:t>→ 一致率 97.8% · 免微调 67.4%</a:t>
+                        <a:t>一致率 97.8% · 免微调 67.4%</a:t>
                       </a:r>
                       <a:endParaRPr sz="1600" b="0">
                         <a:solidFill>
@@ -6253,18 +6657,18 @@
                         </a:lnSpc>
                       </a:pPr>
                       <a:r>
-                        <a:rPr sz="1600" b="0">
+                        <a:rPr sz="1600" b="1">
                           <a:solidFill>
-                            <a:srgbClr val="4A6B80"/>
+                            <a:srgbClr val="0879C9"/>
                           </a:solidFill>
                           <a:latin typeface="微软雅黑" panose="020B0503020204020204" pitchFamily="34" charset="-122"/>
                           <a:ea typeface="微软雅黑" panose="020B0503020204020204" pitchFamily="34" charset="-122"/>
                         </a:rPr>
                         <a:t>完成</a:t>
                       </a:r>
-                      <a:endParaRPr sz="1600" b="0">
+                      <a:endParaRPr sz="1600" b="1">
                         <a:solidFill>
-                          <a:srgbClr val="4A6B80"/>
+                          <a:srgbClr val="0879C9"/>
                         </a:solidFill>
                         <a:latin typeface="微软雅黑" panose="020B0503020204020204" pitchFamily="34" charset="-122"/>
                         <a:ea typeface="微软雅黑" panose="020B0503020204020204" pitchFamily="34" charset="-122"/>
@@ -6306,20 +6710,23 @@
                         <a:lnSpc>
                           <a:spcPct val="100000"/>
                         </a:lnSpc>
+                        <a:buClrTx/>
+                        <a:buSzTx/>
+                        <a:buFontTx/>
                       </a:pPr>
                       <a:r>
                         <a:rPr sz="1600" b="0">
                           <a:solidFill>
-                            <a:srgbClr val="4A6B80"/>
+                            <a:srgbClr val="1A1A1A"/>
                           </a:solidFill>
                           <a:latin typeface="微软雅黑" panose="020B0503020204020204" pitchFamily="34" charset="-122"/>
                           <a:ea typeface="微软雅黑" panose="020B0503020204020204" pitchFamily="34" charset="-122"/>
                         </a:rPr>
-                        <a:t>→ 五类动作 · 生成 26 条用例</a:t>
+                        <a:t>五类动作 · 生成 26 条用例</a:t>
                       </a:r>
                       <a:endParaRPr sz="1600" b="0">
                         <a:solidFill>
-                          <a:srgbClr val="4A6B80"/>
+                          <a:srgbClr val="1A1A1A"/>
                         </a:solidFill>
                         <a:latin typeface="微软雅黑" panose="020B0503020204020204" pitchFamily="34" charset="-122"/>
                         <a:ea typeface="微软雅黑" panose="020B0503020204020204" pitchFamily="34" charset="-122"/>
@@ -6433,18 +6840,18 @@
                         </a:lnSpc>
                       </a:pPr>
                       <a:r>
-                        <a:rPr sz="1600" b="0">
+                        <a:rPr sz="1600" b="1">
                           <a:solidFill>
-                            <a:srgbClr val="4A6B80"/>
+                            <a:srgbClr val="0879C9"/>
                           </a:solidFill>
                           <a:latin typeface="微软雅黑" panose="020B0503020204020204" pitchFamily="34" charset="-122"/>
                           <a:ea typeface="微软雅黑" panose="020B0503020204020204" pitchFamily="34" charset="-122"/>
                         </a:rPr>
                         <a:t>完成</a:t>
                       </a:r>
-                      <a:endParaRPr sz="1600" b="0">
+                      <a:endParaRPr sz="1600" b="1">
                         <a:solidFill>
-                          <a:srgbClr val="4A6B80"/>
+                          <a:srgbClr val="0879C9"/>
                         </a:solidFill>
                         <a:latin typeface="微软雅黑" panose="020B0503020204020204" pitchFamily="34" charset="-122"/>
                         <a:ea typeface="微软雅黑" panose="020B0503020204020204" pitchFamily="34" charset="-122"/>
@@ -6486,20 +6893,23 @@
                         <a:lnSpc>
                           <a:spcPct val="100000"/>
                         </a:lnSpc>
+                        <a:buClrTx/>
+                        <a:buSzTx/>
+                        <a:buFontTx/>
                       </a:pPr>
                       <a:r>
                         <a:rPr sz="1600" b="0">
                           <a:solidFill>
-                            <a:srgbClr val="4A6B80"/>
+                            <a:srgbClr val="1A1A1A"/>
                           </a:solidFill>
                           <a:latin typeface="微软雅黑" panose="020B0503020204020204" pitchFamily="34" charset="-122"/>
                           <a:ea typeface="微软雅黑" panose="020B0503020204020204" pitchFamily="34" charset="-122"/>
                         </a:rPr>
-                        <a:t>→ 静态可执行 92.3% · 无断言 0 条</a:t>
+                        <a:t> 静态可执行 92.3% · 无断言 0 条</a:t>
                       </a:r>
                       <a:endParaRPr sz="1600" b="0">
                         <a:solidFill>
-                          <a:srgbClr val="4A6B80"/>
+                          <a:srgbClr val="1A1A1A"/>
                         </a:solidFill>
                         <a:latin typeface="微软雅黑" panose="020B0503020204020204" pitchFamily="34" charset="-122"/>
                         <a:ea typeface="微软雅黑" panose="020B0503020204020204" pitchFamily="34" charset="-122"/>
@@ -6613,18 +7023,18 @@
                         </a:lnSpc>
                       </a:pPr>
                       <a:r>
-                        <a:rPr sz="1600" b="0">
+                        <a:rPr sz="1600" b="1">
                           <a:solidFill>
-                            <a:srgbClr val="4A6B80"/>
+                            <a:srgbClr val="0879C9"/>
                           </a:solidFill>
                           <a:latin typeface="微软雅黑" panose="020B0503020204020204" pitchFamily="34" charset="-122"/>
                           <a:ea typeface="微软雅黑" panose="020B0503020204020204" pitchFamily="34" charset="-122"/>
                         </a:rPr>
                         <a:t>完成</a:t>
                       </a:r>
-                      <a:endParaRPr sz="1600" b="0">
+                      <a:endParaRPr sz="1600" b="1">
                         <a:solidFill>
-                          <a:srgbClr val="4A6B80"/>
+                          <a:srgbClr val="0879C9"/>
                         </a:solidFill>
                         <a:latin typeface="微软雅黑" panose="020B0503020204020204" pitchFamily="34" charset="-122"/>
                         <a:ea typeface="微软雅黑" panose="020B0503020204020204" pitchFamily="34" charset="-122"/>
@@ -6666,20 +7076,23 @@
                         <a:lnSpc>
                           <a:spcPct val="100000"/>
                         </a:lnSpc>
+                        <a:buClrTx/>
+                        <a:buSzTx/>
+                        <a:buFontTx/>
                       </a:pPr>
                       <a:r>
                         <a:rPr sz="1600" b="0">
                           <a:solidFill>
-                            <a:srgbClr val="4A6B80"/>
+                            <a:srgbClr val="1A1A1A"/>
                           </a:solidFill>
                           <a:latin typeface="微软雅黑" panose="020B0503020204020204" pitchFamily="34" charset="-122"/>
                           <a:ea typeface="微软雅黑" panose="020B0503020204020204" pitchFamily="34" charset="-122"/>
                         </a:rPr>
-                        <a:t>→ 真机 23/24 · 第二轮 22/24</a:t>
+                        <a:t> 真机 23/24 · 第二轮 22/24</a:t>
                       </a:r>
                       <a:endParaRPr sz="1600" b="0">
                         <a:solidFill>
-                          <a:srgbClr val="4A6B80"/>
+                          <a:srgbClr val="1A1A1A"/>
                         </a:solidFill>
                         <a:latin typeface="微软雅黑" panose="020B0503020204020204" pitchFamily="34" charset="-122"/>
                         <a:ea typeface="微软雅黑" panose="020B0503020204020204" pitchFamily="34" charset="-122"/>
@@ -6800,7 +7213,7 @@
                           <a:latin typeface="微软雅黑" panose="020B0503020204020204" pitchFamily="34" charset="-122"/>
                           <a:ea typeface="微软雅黑" panose="020B0503020204020204" pitchFamily="34" charset="-122"/>
                         </a:rPr>
-                        <a:t>超额完成</a:t>
+                        <a:t>完成</a:t>
                       </a:r>
                       <a:endParaRPr sz="1600" b="1">
                         <a:solidFill>
@@ -6846,6 +7259,9 @@
                         <a:lnSpc>
                           <a:spcPct val="100000"/>
                         </a:lnSpc>
+                        <a:buClrTx/>
+                        <a:buSzTx/>
+                        <a:buFontTx/>
                       </a:pPr>
                       <a:r>
                         <a:rPr sz="1600" b="0">
@@ -6855,7 +7271,7 @@
                           <a:latin typeface="微软雅黑" panose="020B0503020204020204" pitchFamily="34" charset="-122"/>
                           <a:ea typeface="微软雅黑" panose="020B0503020204020204" pitchFamily="34" charset="-122"/>
                         </a:rPr>
-                        <a:t>→ 3/3 页 · 5 状态 · 7 跳转</a:t>
+                        <a:t> 3/3 页 · 5 状态 · 7 跳转</a:t>
                       </a:r>
                       <a:endParaRPr sz="1600" b="0">
                         <a:solidFill>
@@ -7025,18 +7441,18 @@
                         </a:lnSpc>
                       </a:pPr>
                       <a:r>
-                        <a:rPr sz="1600" b="0">
+                        <a:rPr sz="1600" b="1">
                           <a:solidFill>
-                            <a:srgbClr val="4A6B80"/>
+                            <a:srgbClr val="0879C9"/>
                           </a:solidFill>
                           <a:latin typeface="微软雅黑" panose="020B0503020204020204" pitchFamily="34" charset="-122"/>
                           <a:ea typeface="微软雅黑" panose="020B0503020204020204" pitchFamily="34" charset="-122"/>
                         </a:rPr>
                         <a:t>完成</a:t>
                       </a:r>
-                      <a:endParaRPr sz="1600" b="0">
+                      <a:endParaRPr sz="1600" b="1">
                         <a:solidFill>
-                          <a:srgbClr val="4A6B80"/>
+                          <a:srgbClr val="0879C9"/>
                         </a:solidFill>
                         <a:latin typeface="微软雅黑" panose="020B0503020204020204" pitchFamily="34" charset="-122"/>
                         <a:ea typeface="微软雅黑" panose="020B0503020204020204" pitchFamily="34" charset="-122"/>
@@ -7078,20 +7494,23 @@
                         <a:lnSpc>
                           <a:spcPct val="100000"/>
                         </a:lnSpc>
+                        <a:buClrTx/>
+                        <a:buSzTx/>
+                        <a:buFontTx/>
                       </a:pPr>
                       <a:r>
                         <a:rPr sz="1600" b="0">
                           <a:solidFill>
-                            <a:srgbClr val="4A6B80"/>
+                            <a:srgbClr val="1A1A1A"/>
                           </a:solidFill>
                           <a:latin typeface="微软雅黑" panose="020B0503020204020204" pitchFamily="34" charset="-122"/>
                           <a:ea typeface="微软雅黑" panose="020B0503020204020204" pitchFamily="34" charset="-122"/>
                         </a:rPr>
-                        <a:t>→ 问题复现 · 探索 · 压力测试 · 回归</a:t>
+                        <a:t> 问题复现 · 探索 · 压力测试 · 回归</a:t>
                       </a:r>
                       <a:endParaRPr sz="1600" b="0">
                         <a:solidFill>
-                          <a:srgbClr val="4A6B80"/>
+                          <a:srgbClr val="1A1A1A"/>
                         </a:solidFill>
                         <a:latin typeface="微软雅黑" panose="020B0503020204020204" pitchFamily="34" charset="-122"/>
                         <a:ea typeface="微软雅黑" panose="020B0503020204020204" pitchFamily="34" charset="-122"/>
@@ -7212,7 +7631,7 @@
                           <a:latin typeface="微软雅黑" panose="020B0503020204020204" pitchFamily="34" charset="-122"/>
                           <a:ea typeface="微软雅黑" panose="020B0503020204020204" pitchFamily="34" charset="-122"/>
                         </a:rPr>
-                        <a:t>超额完成</a:t>
+                        <a:t>完成</a:t>
                       </a:r>
                       <a:endParaRPr sz="1600" b="1">
                         <a:solidFill>
@@ -7258,6 +7677,9 @@
                         <a:lnSpc>
                           <a:spcPct val="100000"/>
                         </a:lnSpc>
+                        <a:buClrTx/>
+                        <a:buSzTx/>
+                        <a:buFontTx/>
                       </a:pPr>
                       <a:r>
                         <a:rPr sz="1600" b="0">
@@ -7267,7 +7689,7 @@
                           <a:latin typeface="微软雅黑" panose="020B0503020204020204" pitchFamily="34" charset="-122"/>
                           <a:ea typeface="微软雅黑" panose="020B0503020204020204" pitchFamily="34" charset="-122"/>
                         </a:rPr>
-                        <a:t>→ 115 轮 · 0 失败 · 126.9 分钟</a:t>
+                        <a:t> 115 轮 · 0 失败 · 126.9 分钟</a:t>
                       </a:r>
                       <a:endParaRPr sz="1600" b="0">
                         <a:solidFill>
@@ -7385,18 +7807,18 @@
                         </a:lnSpc>
                       </a:pPr>
                       <a:r>
-                        <a:rPr sz="1600" b="0">
+                        <a:rPr sz="1600" b="1">
                           <a:solidFill>
-                            <a:srgbClr val="4A6B80"/>
+                            <a:srgbClr val="0879C9"/>
                           </a:solidFill>
                           <a:latin typeface="微软雅黑" panose="020B0503020204020204" pitchFamily="34" charset="-122"/>
                           <a:ea typeface="微软雅黑" panose="020B0503020204020204" pitchFamily="34" charset="-122"/>
                         </a:rPr>
                         <a:t>完成</a:t>
                       </a:r>
-                      <a:endParaRPr sz="1600" b="0">
+                      <a:endParaRPr sz="1600" b="1">
                         <a:solidFill>
-                          <a:srgbClr val="4A6B80"/>
+                          <a:srgbClr val="0879C9"/>
                         </a:solidFill>
                         <a:latin typeface="微软雅黑" panose="020B0503020204020204" pitchFamily="34" charset="-122"/>
                         <a:ea typeface="微软雅黑" panose="020B0503020204020204" pitchFamily="34" charset="-122"/>
@@ -7438,20 +7860,23 @@
                         <a:lnSpc>
                           <a:spcPct val="100000"/>
                         </a:lnSpc>
+                        <a:buClrTx/>
+                        <a:buSzTx/>
+                        <a:buFontTx/>
                       </a:pPr>
                       <a:r>
                         <a:rPr sz="1600" b="0">
                           <a:solidFill>
-                            <a:srgbClr val="4A6B80"/>
+                            <a:srgbClr val="1A1A1A"/>
                           </a:solidFill>
                           <a:latin typeface="微软雅黑" panose="020B0503020204020204" pitchFamily="34" charset="-122"/>
                           <a:ea typeface="微软雅黑" panose="020B0503020204020204" pitchFamily="34" charset="-122"/>
                         </a:rPr>
-                        <a:t>→ 六类信号 · 四分类归因</a:t>
+                        <a:t> 六类信号 · 四分类归因</a:t>
                       </a:r>
                       <a:endParaRPr sz="1600" b="0">
                         <a:solidFill>
-                          <a:srgbClr val="4A6B80"/>
+                          <a:srgbClr val="1A1A1A"/>
                         </a:solidFill>
                         <a:latin typeface="微软雅黑" panose="020B0503020204020204" pitchFamily="34" charset="-122"/>
                         <a:ea typeface="微软雅黑" panose="020B0503020204020204" pitchFamily="34" charset="-122"/>
@@ -7565,18 +7990,18 @@
                         </a:lnSpc>
                       </a:pPr>
                       <a:r>
-                        <a:rPr sz="1600" b="0">
+                        <a:rPr sz="1600" b="1">
                           <a:solidFill>
-                            <a:srgbClr val="4A6B80"/>
+                            <a:srgbClr val="0879C9"/>
                           </a:solidFill>
                           <a:latin typeface="微软雅黑" panose="020B0503020204020204" pitchFamily="34" charset="-122"/>
                           <a:ea typeface="微软雅黑" panose="020B0503020204020204" pitchFamily="34" charset="-122"/>
                         </a:rPr>
                         <a:t>完成</a:t>
                       </a:r>
-                      <a:endParaRPr sz="1600" b="0">
+                      <a:endParaRPr sz="1600" b="1">
                         <a:solidFill>
-                          <a:srgbClr val="4A6B80"/>
+                          <a:srgbClr val="0879C9"/>
                         </a:solidFill>
                         <a:latin typeface="微软雅黑" panose="020B0503020204020204" pitchFamily="34" charset="-122"/>
                         <a:ea typeface="微软雅黑" panose="020B0503020204020204" pitchFamily="34" charset="-122"/>
@@ -7618,20 +8043,23 @@
                         <a:lnSpc>
                           <a:spcPct val="100000"/>
                         </a:lnSpc>
+                        <a:buClrTx/>
+                        <a:buSzTx/>
+                        <a:buFontTx/>
                       </a:pPr>
                       <a:r>
                         <a:rPr sz="1600" b="0">
                           <a:solidFill>
-                            <a:srgbClr val="4A6B80"/>
+                            <a:srgbClr val="1A1A1A"/>
                           </a:solidFill>
                           <a:latin typeface="微软雅黑" panose="020B0503020204020204" pitchFamily="34" charset="-122"/>
                           <a:ea typeface="微软雅黑" panose="020B0503020204020204" pitchFamily="34" charset="-122"/>
                         </a:rPr>
-                        <a:t>→ 轨迹转回归集，可重放</a:t>
+                        <a:t> 轨迹转回归集，可重放</a:t>
                       </a:r>
                       <a:endParaRPr sz="1600" b="0">
                         <a:solidFill>
-                          <a:srgbClr val="4A6B80"/>
+                          <a:srgbClr val="1A1A1A"/>
                         </a:solidFill>
                         <a:latin typeface="微软雅黑" panose="020B0503020204020204" pitchFamily="34" charset="-122"/>
                         <a:ea typeface="微软雅黑" panose="020B0503020204020204" pitchFamily="34" charset="-122"/>
@@ -7804,7 +8232,7 @@
                           <a:latin typeface="微软雅黑" panose="020B0503020204020204" pitchFamily="34" charset="-122"/>
                           <a:ea typeface="微软雅黑" panose="020B0503020204020204" pitchFamily="34" charset="-122"/>
                         </a:rPr>
-                        <a:t>超额完成</a:t>
+                        <a:t>完成</a:t>
                       </a:r>
                       <a:endParaRPr sz="1600" b="1">
                         <a:solidFill>
@@ -7850,6 +8278,9 @@
                         <a:lnSpc>
                           <a:spcPct val="100000"/>
                         </a:lnSpc>
+                        <a:buClrTx/>
+                        <a:buSzTx/>
+                        <a:buFontTx/>
                       </a:pPr>
                       <a:r>
                         <a:rPr sz="1600" b="0">
@@ -7859,7 +8290,7 @@
                           <a:latin typeface="微软雅黑" panose="020B0503020204020204" pitchFamily="34" charset="-122"/>
                           <a:ea typeface="微软雅黑" panose="020B0503020204020204" pitchFamily="34" charset="-122"/>
                         </a:rPr>
-                        <a:t>→ 13 个应用 · 46 项样本</a:t>
+                        <a:t> 13 个应用 · 46 项样本</a:t>
                       </a:r>
                       <a:endParaRPr sz="1600" b="0">
                         <a:solidFill>
@@ -7977,18 +8408,18 @@
                         </a:lnSpc>
                       </a:pPr>
                       <a:r>
-                        <a:rPr sz="1600" b="0">
+                        <a:rPr sz="1600" b="1">
                           <a:solidFill>
-                            <a:srgbClr val="4A6B80"/>
+                            <a:srgbClr val="0879C9"/>
                           </a:solidFill>
                           <a:latin typeface="微软雅黑" panose="020B0503020204020204" pitchFamily="34" charset="-122"/>
                           <a:ea typeface="微软雅黑" panose="020B0503020204020204" pitchFamily="34" charset="-122"/>
                         </a:rPr>
                         <a:t>完成</a:t>
                       </a:r>
-                      <a:endParaRPr sz="1600" b="0">
+                      <a:endParaRPr sz="1600" b="1">
                         <a:solidFill>
-                          <a:srgbClr val="4A6B80"/>
+                          <a:srgbClr val="0879C9"/>
                         </a:solidFill>
                         <a:latin typeface="微软雅黑" panose="020B0503020204020204" pitchFamily="34" charset="-122"/>
                         <a:ea typeface="微软雅黑" panose="020B0503020204020204" pitchFamily="34" charset="-122"/>
@@ -8030,20 +8461,23 @@
                         <a:lnSpc>
                           <a:spcPct val="100000"/>
                         </a:lnSpc>
+                        <a:buClrTx/>
+                        <a:buSzTx/>
+                        <a:buFontTx/>
                       </a:pPr>
                       <a:r>
                         <a:rPr sz="1600" b="0">
                           <a:solidFill>
-                            <a:srgbClr val="4A6B80"/>
+                            <a:srgbClr val="1A1A1A"/>
                           </a:solidFill>
                           <a:latin typeface="微软雅黑" panose="020B0503020204020204" pitchFamily="34" charset="-122"/>
                           <a:ea typeface="微软雅黑" panose="020B0503020204020204" pitchFamily="34" charset="-122"/>
                         </a:rPr>
-                        <a:t>→ 五份材料齐备</a:t>
+                        <a:t> 五份材料齐备</a:t>
                       </a:r>
                       <a:endParaRPr sz="1600" b="0">
                         <a:solidFill>
-                          <a:srgbClr val="4A6B80"/>
+                          <a:srgbClr val="1A1A1A"/>
                         </a:solidFill>
                         <a:latin typeface="微软雅黑" panose="020B0503020204020204" pitchFamily="34" charset="-122"/>
                         <a:ea typeface="微软雅黑" panose="020B0503020204020204" pitchFamily="34" charset="-122"/>
@@ -8157,18 +8591,18 @@
                         </a:lnSpc>
                       </a:pPr>
                       <a:r>
-                        <a:rPr sz="1600" b="0">
+                        <a:rPr sz="1600" b="1">
                           <a:solidFill>
-                            <a:srgbClr val="4A6B80"/>
+                            <a:srgbClr val="0879C9"/>
                           </a:solidFill>
                           <a:latin typeface="微软雅黑" panose="020B0503020204020204" pitchFamily="34" charset="-122"/>
                           <a:ea typeface="微软雅黑" panose="020B0503020204020204" pitchFamily="34" charset="-122"/>
                         </a:rPr>
                         <a:t>完成</a:t>
                       </a:r>
-                      <a:endParaRPr sz="1600" b="0">
+                      <a:endParaRPr sz="1600" b="1">
                         <a:solidFill>
-                          <a:srgbClr val="4A6B80"/>
+                          <a:srgbClr val="0879C9"/>
                         </a:solidFill>
                         <a:latin typeface="微软雅黑" panose="020B0503020204020204" pitchFamily="34" charset="-122"/>
                         <a:ea typeface="微软雅黑" panose="020B0503020204020204" pitchFamily="34" charset="-122"/>
@@ -8210,20 +8644,23 @@
                         <a:lnSpc>
                           <a:spcPct val="100000"/>
                         </a:lnSpc>
+                        <a:buClrTx/>
+                        <a:buSzTx/>
+                        <a:buFontTx/>
                       </a:pPr>
                       <a:r>
                         <a:rPr sz="1600" b="0">
                           <a:solidFill>
-                            <a:srgbClr val="4A6B80"/>
+                            <a:srgbClr val="1A1A1A"/>
                           </a:solidFill>
                           <a:latin typeface="微软雅黑" panose="020B0503020204020204" pitchFamily="34" charset="-122"/>
                           <a:ea typeface="微软雅黑" panose="020B0503020204020204" pitchFamily="34" charset="-122"/>
                         </a:rPr>
-                        <a:t>→ 命令行 · 离线 · 脚本导出</a:t>
+                        <a:t> 命令行 · 离线 · 脚本导出</a:t>
                       </a:r>
                       <a:endParaRPr sz="1600" b="0">
                         <a:solidFill>
-                          <a:srgbClr val="4A6B80"/>
+                          <a:srgbClr val="1A1A1A"/>
                         </a:solidFill>
                         <a:latin typeface="微软雅黑" panose="020B0503020204020204" pitchFamily="34" charset="-122"/>
                         <a:ea typeface="微软雅黑" panose="020B0503020204020204" pitchFamily="34" charset="-122"/>
@@ -8269,7 +8706,7 @@
 </p:sld>
 </file>
 
-<file path=ppt/slides/slide15.xml><?xml version="1.0" encoding="utf-8"?>
+<file path=ppt/slides/slide16.xml><?xml version="1.0" encoding="utf-8"?>
 <p:sld xmlns:a="http://schemas.openxmlformats.org/drawingml/2006/main" xmlns:r="http://schemas.openxmlformats.org/officeDocument/2006/relationships" xmlns:p="http://schemas.openxmlformats.org/presentationml/2006/main">
   <p:cSld>
     <p:bg>
